--- a/lectures/week-07/lecture-en.pptx
+++ b/lectures/week-07/lecture-en.pptx
@@ -23192,7 +23192,7 @@
                           </a:solidFill>
                           <a:latin typeface="Source Han Sans SC"/>
                         </a:rPr>
-                        <a:t>1 898</a:t>
+                        <a:t>1,898</a:t>
                       </a:r>
                     </a:p>
                   </a:txBody>
@@ -23326,7 +23326,7 @@
                           </a:solidFill>
                           <a:latin typeface="Source Han Sans SC"/>
                         </a:rPr>
-                        <a:t>1 898</a:t>
+                        <a:t>1,898</a:t>
                       </a:r>
                     </a:p>
                   </a:txBody>
@@ -25304,7 +25304,7 @@
                           </a:solidFill>
                           <a:latin typeface="Source Han Sans SC"/>
                         </a:rPr>
-                        <a:t>17 226</a:t>
+                        <a:t>17,226</a:t>
                       </a:r>
                     </a:p>
                   </a:txBody>
@@ -25416,7 +25416,7 @@
                           </a:solidFill>
                           <a:latin typeface="Source Han Sans SC"/>
                         </a:rPr>
-                        <a:t>1 898</a:t>
+                        <a:t>1,898</a:t>
                       </a:r>
                     </a:p>
                   </a:txBody>
@@ -25528,7 +25528,7 @@
                           </a:solidFill>
                           <a:latin typeface="Source Han Sans SC"/>
                         </a:rPr>
-                        <a:t>21 312</a:t>
+                        <a:t>21,312</a:t>
                       </a:r>
                     </a:p>
                   </a:txBody>
@@ -25640,7 +25640,7 @@
                           </a:solidFill>
                           <a:latin typeface="Source Han Sans SC"/>
                         </a:rPr>
-                        <a:t>1 898</a:t>
+                        <a:t>1,898</a:t>
                       </a:r>
                     </a:p>
                   </a:txBody>
@@ -25752,7 +25752,7 @@
                           </a:solidFill>
                           <a:latin typeface="Source Han Sans SC"/>
                         </a:rPr>
-                        <a:t>1 898</a:t>
+                        <a:t>1,898</a:t>
                       </a:r>
                     </a:p>
                   </a:txBody>
@@ -54162,7 +54162,7 @@
                           </a:solidFill>
                           <a:latin typeface="Source Han Sans SC"/>
                         </a:rPr>
-                        <a:t>8 320</a:t>
+                        <a:t>8,320</a:t>
                       </a:r>
                     </a:p>
                   </a:txBody>
@@ -54184,7 +54184,7 @@
                           </a:solidFill>
                           <a:latin typeface="Source Han Sans SC"/>
                         </a:rPr>
-                        <a:t>8 320</a:t>
+                        <a:t>8,320</a:t>
                       </a:r>
                     </a:p>
                   </a:txBody>
@@ -54252,7 +54252,7 @@
                           </a:solidFill>
                           <a:latin typeface="Source Han Sans SC"/>
                         </a:rPr>
-                        <a:t>8 256</a:t>
+                        <a:t>8,256</a:t>
                       </a:r>
                     </a:p>
                   </a:txBody>
@@ -54274,7 +54274,7 @@
                           </a:solidFill>
                           <a:latin typeface="Source Han Sans SC"/>
                         </a:rPr>
-                        <a:t>16 576</a:t>
+                        <a:t>16,576</a:t>
                       </a:r>
                     </a:p>
                   </a:txBody>
@@ -54364,7 +54364,7 @@
                           </a:solidFill>
                           <a:latin typeface="Source Han Sans SC"/>
                         </a:rPr>
-                        <a:t>17 226</a:t>
+                        <a:t>17,226</a:t>
                       </a:r>
                     </a:p>
                   </a:txBody>
@@ -54522,7 +54522,7 @@
                           </a:solidFill>
                           <a:latin typeface="Source Han Sans SC"/>
                         </a:rPr>
-                        <a:t>1 168</a:t>
+                        <a:t>1,168</a:t>
                       </a:r>
                     </a:p>
                   </a:txBody>
@@ -54544,7 +54544,7 @@
                           </a:solidFill>
                           <a:latin typeface="Source Han Sans SC"/>
                         </a:rPr>
-                        <a:t>1 248</a:t>
+                        <a:t>1,248</a:t>
                       </a:r>
                     </a:p>
                   </a:txBody>
@@ -54634,7 +54634,7 @@
                           </a:solidFill>
                           <a:latin typeface="Source Han Sans SC"/>
                         </a:rPr>
-                        <a:t>1 898</a:t>
+                        <a:t>1,898</a:t>
                       </a:r>
                     </a:p>
                   </a:txBody>
